--- a/2.studyUnity1(2D)/Ge1_3_RigidbodyColider.pptx
+++ b/2.studyUnity1(2D)/Ge1_3_RigidbodyColider.pptx
@@ -249,7 +249,7 @@
           <a:p>
             <a:fld id="{C9C3C1B3-0E61-4942-A09A-02F2EAE54150}" type="datetimeFigureOut">
               <a:rPr kumimoji="1" lang="ja-JP" altLang="en-US" smtClean="0"/>
-              <a:t>2023/9/7</a:t>
+              <a:t>2025/7/8</a:t>
             </a:fld>
             <a:endParaRPr kumimoji="1" lang="ja-JP" altLang="en-US"/>
           </a:p>
@@ -695,7 +695,7 @@
           <a:p>
             <a:fld id="{691E08CE-871E-42A1-882B-8194E9FA60B7}" type="datetimeFigureOut">
               <a:rPr kumimoji="1" lang="ja-JP" altLang="en-US" smtClean="0"/>
-              <a:t>2023/9/7</a:t>
+              <a:t>2025/7/8</a:t>
             </a:fld>
             <a:endParaRPr kumimoji="1" lang="ja-JP" altLang="en-US"/>
           </a:p>
@@ -925,7 +925,7 @@
           <a:p>
             <a:fld id="{691E08CE-871E-42A1-882B-8194E9FA60B7}" type="datetimeFigureOut">
               <a:rPr kumimoji="1" lang="ja-JP" altLang="en-US" smtClean="0"/>
-              <a:t>2023/9/7</a:t>
+              <a:t>2025/7/8</a:t>
             </a:fld>
             <a:endParaRPr kumimoji="1" lang="ja-JP" altLang="en-US"/>
           </a:p>
@@ -1165,7 +1165,7 @@
           <a:p>
             <a:fld id="{691E08CE-871E-42A1-882B-8194E9FA60B7}" type="datetimeFigureOut">
               <a:rPr kumimoji="1" lang="ja-JP" altLang="en-US" smtClean="0"/>
-              <a:t>2023/9/7</a:t>
+              <a:t>2025/7/8</a:t>
             </a:fld>
             <a:endParaRPr kumimoji="1" lang="ja-JP" altLang="en-US"/>
           </a:p>
@@ -1395,7 +1395,7 @@
           <a:p>
             <a:fld id="{691E08CE-871E-42A1-882B-8194E9FA60B7}" type="datetimeFigureOut">
               <a:rPr kumimoji="1" lang="ja-JP" altLang="en-US" smtClean="0"/>
-              <a:t>2023/9/7</a:t>
+              <a:t>2025/7/8</a:t>
             </a:fld>
             <a:endParaRPr kumimoji="1" lang="ja-JP" altLang="en-US"/>
           </a:p>
@@ -1670,7 +1670,7 @@
           <a:p>
             <a:fld id="{691E08CE-871E-42A1-882B-8194E9FA60B7}" type="datetimeFigureOut">
               <a:rPr kumimoji="1" lang="ja-JP" altLang="en-US" smtClean="0"/>
-              <a:t>2023/9/7</a:t>
+              <a:t>2025/7/8</a:t>
             </a:fld>
             <a:endParaRPr kumimoji="1" lang="ja-JP" altLang="en-US"/>
           </a:p>
@@ -1999,7 +1999,7 @@
           <a:p>
             <a:fld id="{691E08CE-871E-42A1-882B-8194E9FA60B7}" type="datetimeFigureOut">
               <a:rPr kumimoji="1" lang="ja-JP" altLang="en-US" smtClean="0"/>
-              <a:t>2023/9/7</a:t>
+              <a:t>2025/7/8</a:t>
             </a:fld>
             <a:endParaRPr kumimoji="1" lang="ja-JP" altLang="en-US"/>
           </a:p>
@@ -2475,7 +2475,7 @@
           <a:p>
             <a:fld id="{691E08CE-871E-42A1-882B-8194E9FA60B7}" type="datetimeFigureOut">
               <a:rPr kumimoji="1" lang="ja-JP" altLang="en-US" smtClean="0"/>
-              <a:t>2023/9/7</a:t>
+              <a:t>2025/7/8</a:t>
             </a:fld>
             <a:endParaRPr kumimoji="1" lang="ja-JP" altLang="en-US"/>
           </a:p>
@@ -2616,7 +2616,7 @@
           <a:p>
             <a:fld id="{691E08CE-871E-42A1-882B-8194E9FA60B7}" type="datetimeFigureOut">
               <a:rPr kumimoji="1" lang="ja-JP" altLang="en-US" smtClean="0"/>
-              <a:t>2023/9/7</a:t>
+              <a:t>2025/7/8</a:t>
             </a:fld>
             <a:endParaRPr kumimoji="1" lang="ja-JP" altLang="en-US"/>
           </a:p>
@@ -2729,7 +2729,7 @@
           <a:p>
             <a:fld id="{691E08CE-871E-42A1-882B-8194E9FA60B7}" type="datetimeFigureOut">
               <a:rPr kumimoji="1" lang="ja-JP" altLang="en-US" smtClean="0"/>
-              <a:t>2023/9/7</a:t>
+              <a:t>2025/7/8</a:t>
             </a:fld>
             <a:endParaRPr kumimoji="1" lang="ja-JP" altLang="en-US"/>
           </a:p>
@@ -3072,7 +3072,7 @@
           <a:p>
             <a:fld id="{691E08CE-871E-42A1-882B-8194E9FA60B7}" type="datetimeFigureOut">
               <a:rPr kumimoji="1" lang="ja-JP" altLang="en-US" smtClean="0"/>
-              <a:t>2023/9/7</a:t>
+              <a:t>2025/7/8</a:t>
             </a:fld>
             <a:endParaRPr kumimoji="1" lang="ja-JP" altLang="en-US"/>
           </a:p>
@@ -3360,7 +3360,7 @@
           <a:p>
             <a:fld id="{691E08CE-871E-42A1-882B-8194E9FA60B7}" type="datetimeFigureOut">
               <a:rPr kumimoji="1" lang="ja-JP" altLang="en-US" smtClean="0"/>
-              <a:t>2023/9/7</a:t>
+              <a:t>2025/7/8</a:t>
             </a:fld>
             <a:endParaRPr kumimoji="1" lang="ja-JP" altLang="en-US"/>
           </a:p>
@@ -3633,7 +3633,7 @@
           <a:p>
             <a:fld id="{691E08CE-871E-42A1-882B-8194E9FA60B7}" type="datetimeFigureOut">
               <a:rPr kumimoji="1" lang="ja-JP" altLang="en-US" smtClean="0"/>
-              <a:t>2023/9/7</a:t>
+              <a:t>2025/7/8</a:t>
             </a:fld>
             <a:endParaRPr kumimoji="1" lang="ja-JP" altLang="en-US"/>
           </a:p>
@@ -5623,7 +5623,7 @@
         <p:spPr>
           <a:xfrm>
             <a:off x="6262172" y="1352922"/>
-            <a:ext cx="5929828" cy="2246769"/>
+            <a:ext cx="5929828" cy="1815882"/>
           </a:xfrm>
           <a:prstGeom prst="rect">
             <a:avLst/>
@@ -5651,31 +5651,24 @@
           <a:p>
             <a:r>
               <a:rPr lang="ja-JP" altLang="en-US" sz="2800" dirty="0"/>
-              <a:t>・球</a:t>
+              <a:t>・球と球</a:t>
             </a:r>
             <a:endParaRPr lang="en-US" altLang="ja-JP" sz="2800" dirty="0"/>
           </a:p>
           <a:p>
             <a:r>
               <a:rPr lang="ja-JP" altLang="en-US" sz="2800" dirty="0"/>
-              <a:t>・正六面体</a:t>
+              <a:t>・正六面体と正六面体</a:t>
             </a:r>
             <a:endParaRPr lang="en-US" altLang="ja-JP" sz="2800" dirty="0"/>
           </a:p>
           <a:p>
+            <a:endParaRPr kumimoji="1" lang="en-US" altLang="ja-JP" sz="2800" dirty="0"/>
+          </a:p>
+          <a:p>
             <a:r>
               <a:rPr lang="ja-JP" altLang="en-US" sz="2800" dirty="0"/>
-              <a:t>・正四面体</a:t>
-            </a:r>
-            <a:endParaRPr lang="en-US" altLang="ja-JP" sz="2800" dirty="0"/>
-          </a:p>
-          <a:p>
-            <a:endParaRPr kumimoji="1" lang="en-US" altLang="ja-JP" sz="2800" dirty="0"/>
-          </a:p>
-          <a:p>
-            <a:r>
-              <a:rPr lang="ja-JP" altLang="en-US" sz="2800" dirty="0"/>
-              <a:t>で衝突動作を行うデモを作成せよ。</a:t>
+              <a:t>で衝突判定を行うデモを作成せよ。</a:t>
             </a:r>
             <a:endParaRPr kumimoji="1" lang="en-US" altLang="ja-JP" sz="2800" dirty="0"/>
           </a:p>
@@ -5719,10 +5712,10 @@
       </p:pic>
       <p:sp>
         <p:nvSpPr>
-          <p:cNvPr id="3" name="テキスト ボックス 2">
-            <a:extLst>
-              <a:ext uri="{FF2B5EF4-FFF2-40B4-BE49-F238E27FC236}">
-                <a16:creationId xmlns:a16="http://schemas.microsoft.com/office/drawing/2014/main" id="{04E804AF-4C09-400D-A893-2F893A0A3BED}"/>
+          <p:cNvPr id="4" name="テキスト ボックス 3">
+            <a:extLst>
+              <a:ext uri="{FF2B5EF4-FFF2-40B4-BE49-F238E27FC236}">
+                <a16:creationId xmlns:a16="http://schemas.microsoft.com/office/drawing/2014/main" id="{12CB7273-08A1-4E49-8FD3-3673E102AE48}"/>
               </a:ext>
             </a:extLst>
           </p:cNvPr>
@@ -5731,27 +5724,14 @@
         </p:nvSpPr>
         <p:spPr>
           <a:xfrm>
-            <a:off x="502239" y="4987151"/>
-            <a:ext cx="6186309" cy="646331"/>
+            <a:off x="848412" y="4873658"/>
+            <a:ext cx="5262979" cy="369332"/>
           </a:xfrm>
           <a:prstGeom prst="rect">
             <a:avLst/>
           </a:prstGeom>
+          <a:noFill/>
         </p:spPr>
-        <p:style>
-          <a:lnRef idx="2">
-            <a:schemeClr val="accent6"/>
-          </a:lnRef>
-          <a:fillRef idx="1">
-            <a:schemeClr val="lt1"/>
-          </a:fillRef>
-          <a:effectRef idx="0">
-            <a:schemeClr val="accent6"/>
-          </a:effectRef>
-          <a:fontRef idx="minor">
-            <a:schemeClr val="dk1"/>
-          </a:fontRef>
-        </p:style>
         <p:txBody>
           <a:bodyPr wrap="none" rtlCol="0">
             <a:spAutoFit/>
@@ -5759,15 +5739,12 @@
           <a:lstStyle/>
           <a:p>
             <a:r>
-              <a:rPr lang="ja-JP" altLang="en-US" dirty="0"/>
-              <a:t>正四面体のオブジェクトは自分で作る必要があります。</a:t>
-            </a:r>
-            <a:endParaRPr lang="en-US" altLang="ja-JP" dirty="0"/>
-          </a:p>
-          <a:p>
-            <a:r>
-              <a:rPr kumimoji="1" lang="ja-JP" altLang="en-US" dirty="0"/>
-              <a:t>作り方を検索して作成し、入れてください。</a:t>
+              <a:rPr kumimoji="1" lang="en-US" altLang="ja-JP"/>
+              <a:t>※</a:t>
+            </a:r>
+            <a:r>
+              <a:rPr kumimoji="1" lang="ja-JP" altLang="en-US"/>
+              <a:t>衝突した際はマテリアルの色を変えてください</a:t>
             </a:r>
           </a:p>
         </p:txBody>
